--- a/Morning Service.pptx
+++ b/Morning Service.pptx
@@ -8269,7 +8269,7 @@
                 <a:latin typeface="Calibri"/>
                 <a:ea typeface="DejaVu Sans"/>
               </a:rPr>
-              <a:t>2026-03-03, Morning Service</a:t>
+              <a:t>2026-03-05, Morning Service</a:t>
             </a:r>
             <a:endParaRPr b="0" lang="en-CA" sz="3600" spc="-1" strike="noStrike">
               <a:latin typeface="Arial"/>
